--- a/dist/초2/수학/수와계산/초2_수학_수와계산_08_3단과6단_학생용.pptx
+++ b/dist/초2/수학/수와계산/초2_수학_수와계산_08_3단과6단_학생용.pptx
@@ -120,13 +120,13 @@
   <p:extLst>
     <p:ext uri="{521415D9-36F7-43E2-AB2F-B90AF26B5E84}">
       <p14:sectionLst xmlns:p14="http://schemas.microsoft.com/office/powerpoint/2010/main">
-        <p14:section name="도입" id="{2df253e5-58cc-d73b-19d4-828f9366d6da}">
+        <p14:section name="도입" id="{3b1616db-7c80-9e32-1f18-803fe6f8bed5}">
           <p14:sldIdLst>
             <p14:sldId id="256"/>
             <p14:sldId id="257"/>
           </p14:sldIdLst>
         </p14:section>
-        <p14:section name="개념" id="{df809c83-0636-da5a-3ee5-29d11d2057bb}">
+        <p14:section name="개념" id="{83a1e704-b1c6-e093-7de7-dd97812def7a}">
           <p14:sldIdLst>
             <p14:sldId id="258"/>
             <p14:sldId id="259"/>
@@ -136,24 +136,24 @@
             <p14:sldId id="263"/>
           </p14:sldIdLst>
         </p14:section>
-        <p14:section name="연습" id="{a8c1effa-115f-0dc6-58c0-a64281048c77}">
+        <p14:section name="연습" id="{c090bc33-da23-4b1c-ab15-67e1f7c79d6f}">
           <p14:sldIdLst>
             <p14:sldId id="264"/>
             <p14:sldId id="265"/>
           </p14:sldIdLst>
         </p14:section>
-        <p14:section name="확인" id="{6c197b5f-3120-f6ff-6619-754e9ecca052}">
+        <p14:section name="확인" id="{c4bcc2e4-f58c-2067-e070-1f25f4aaeb82}">
           <p14:sldIdLst>
             <p14:sldId id="266"/>
             <p14:sldId id="267"/>
           </p14:sldIdLst>
         </p14:section>
-        <p14:section name="정리" id="{d311c5e5-a035-1f9f-18ae-790abbccc974}">
+        <p14:section name="정리" id="{5fffaf20-6e69-5cad-c6ea-e877e6fb31a2}">
           <p14:sldIdLst>
             <p14:sldId id="268"/>
           </p14:sldIdLst>
         </p14:section>
-        <p14:section name="보충" id="{279b0b36-e11b-545c-efc0-511f94da6d70}">
+        <p14:section name="보충" id="{7c145f80-ee87-1771-785c-b36be408ce6e}">
           <p14:sldIdLst>
             <p14:sldId id="269"/>
           </p14:sldIdLst>

--- a/dist/초2/수학/수와계산/초2_수학_수와계산_08_3단과6단_학생용.pptx
+++ b/dist/초2/수학/수와계산/초2_수학_수와계산_08_3단과6단_학생용.pptx
@@ -120,13 +120,13 @@
   <p:extLst>
     <p:ext uri="{521415D9-36F7-43E2-AB2F-B90AF26B5E84}">
       <p14:sectionLst xmlns:p14="http://schemas.microsoft.com/office/powerpoint/2010/main">
-        <p14:section name="도입" id="{3b1616db-7c80-9e32-1f18-803fe6f8bed5}">
+        <p14:section name="도입" id="{1ad7b14d-b923-303c-c5aa-cd1227a72414}">
           <p14:sldIdLst>
             <p14:sldId id="256"/>
             <p14:sldId id="257"/>
           </p14:sldIdLst>
         </p14:section>
-        <p14:section name="개념" id="{83a1e704-b1c6-e093-7de7-dd97812def7a}">
+        <p14:section name="개념" id="{0feead51-865a-ed3c-3b57-ee082953db2f}">
           <p14:sldIdLst>
             <p14:sldId id="258"/>
             <p14:sldId id="259"/>
@@ -136,24 +136,24 @@
             <p14:sldId id="263"/>
           </p14:sldIdLst>
         </p14:section>
-        <p14:section name="연습" id="{c090bc33-da23-4b1c-ab15-67e1f7c79d6f}">
+        <p14:section name="연습" id="{0d34fd46-ec47-c872-d83a-5367d6f3bce9}">
           <p14:sldIdLst>
             <p14:sldId id="264"/>
             <p14:sldId id="265"/>
           </p14:sldIdLst>
         </p14:section>
-        <p14:section name="확인" id="{c4bcc2e4-f58c-2067-e070-1f25f4aaeb82}">
+        <p14:section name="확인" id="{8c105896-55e2-2594-9f44-961fa43de93b}">
           <p14:sldIdLst>
             <p14:sldId id="266"/>
             <p14:sldId id="267"/>
           </p14:sldIdLst>
         </p14:section>
-        <p14:section name="정리" id="{5fffaf20-6e69-5cad-c6ea-e877e6fb31a2}">
+        <p14:section name="정리" id="{7c6c7ad6-cd8f-5185-a059-d8938dd06a85}">
           <p14:sldIdLst>
             <p14:sldId id="268"/>
           </p14:sldIdLst>
         </p14:section>
-        <p14:section name="보충" id="{7c145f80-ee87-1771-785c-b36be408ce6e}">
+        <p14:section name="보충" id="{291f3b81-9891-4b1b-2da6-e06fce7b7a16}">
           <p14:sldIdLst>
             <p14:sldId id="269"/>
           </p14:sldIdLst>
@@ -12426,7 +12426,7 @@
           </p:nvPr>
         </p:nvGraphicFramePr>
         <p:xfrm>
-          <a:off x="548640" y="3037840"/>
+          <a:off x="548640" y="3054350"/>
           <a:ext cx="11091672" cy="914400"/>
         </p:xfrm>
         <a:graphic>
@@ -12444,7 +12444,7 @@
                 <a:gridCol w="1232408"/>
                 <a:gridCol w="1232408"/>
               </a:tblGrid>
-              <a:tr h="528320">
+              <a:tr h="511810">
                 <a:tc>
                   <a:txBody>
                     <a:bodyPr/>
@@ -13058,7 +13058,7 @@
                   </a:tcPr>
                 </a:tc>
               </a:tr>
-              <a:tr h="528320">
+              <a:tr h="511810">
                 <a:tc>
                   <a:txBody>
                     <a:bodyPr/>
@@ -17278,7 +17278,7 @@
           </p:nvPr>
         </p:nvGraphicFramePr>
         <p:xfrm>
-          <a:off x="548640" y="2773680"/>
+          <a:off x="548640" y="2798445"/>
           <a:ext cx="11091672" cy="914400"/>
         </p:xfrm>
         <a:graphic>
@@ -17297,7 +17297,7 @@
                 <a:gridCol w="1109167"/>
                 <a:gridCol w="1109167"/>
               </a:tblGrid>
-              <a:tr h="528320">
+              <a:tr h="511810">
                 <a:tc>
                   <a:txBody>
                     <a:bodyPr/>
@@ -17979,7 +17979,7 @@
                   </a:tcPr>
                 </a:tc>
               </a:tr>
-              <a:tr h="528320">
+              <a:tr h="511810">
                 <a:tc>
                   <a:txBody>
                     <a:bodyPr/>
@@ -18661,7 +18661,7 @@
                   </a:tcPr>
                 </a:tc>
               </a:tr>
-              <a:tr h="528320">
+              <a:tr h="511810">
                 <a:tc>
                   <a:txBody>
                     <a:bodyPr/>
